--- a/public/videos/repositories/niche-compare-hub/niche-compare-hub-tech-preview.pptx
+++ b/public/videos/repositories/niche-compare-hub/niche-compare-hub-tech-preview.pptx
@@ -134,7 +134,7 @@
           <p:cNvPr id="2" name="タイトル 1">
             <a:extLst>
               <a:ext uri="{FF2B5EF4-FFF2-40B4-BE49-F238E27FC236}">
-                <a16:creationId xmlns:a16="http://schemas.microsoft.com/office/drawing/2014/main" id="{13837A1F-D670-ED8E-FB02-7E06C382DDBF}"/>
+                <a16:creationId xmlns:a16="http://schemas.microsoft.com/office/drawing/2014/main" id="{CFA6A485-56E6-0EF4-2E0D-2405A5E1A43D}"/>
               </a:ext>
             </a:extLst>
           </p:cNvPr>
@@ -171,7 +171,7 @@
           <p:cNvPr id="3" name="字幕 2">
             <a:extLst>
               <a:ext uri="{FF2B5EF4-FFF2-40B4-BE49-F238E27FC236}">
-                <a16:creationId xmlns:a16="http://schemas.microsoft.com/office/drawing/2014/main" id="{9E364AF2-9338-01F6-F2F0-EC095D8809E2}"/>
+                <a16:creationId xmlns:a16="http://schemas.microsoft.com/office/drawing/2014/main" id="{E4485C30-76CD-76FF-0740-3E411BC91E71}"/>
               </a:ext>
             </a:extLst>
           </p:cNvPr>
@@ -241,7 +241,7 @@
           <p:cNvPr id="4" name="日付プレースホルダー 3">
             <a:extLst>
               <a:ext uri="{FF2B5EF4-FFF2-40B4-BE49-F238E27FC236}">
-                <a16:creationId xmlns:a16="http://schemas.microsoft.com/office/drawing/2014/main" id="{7D750F50-69A1-810D-D42E-F099D37A7340}"/>
+                <a16:creationId xmlns:a16="http://schemas.microsoft.com/office/drawing/2014/main" id="{FD6D9CCB-EE76-EB58-E99C-92CDC9619F63}"/>
               </a:ext>
             </a:extLst>
           </p:cNvPr>
@@ -257,7 +257,7 @@
           <a:bodyPr/>
           <a:lstStyle/>
           <a:p>
-            <a:fld id="{D5A826E8-87E6-4C21-A3D7-962979163097}" type="datetimeFigureOut">
+            <a:fld id="{6F22473F-8440-407A-B58F-DBB6E30D6157}" type="datetimeFigureOut">
               <a:rPr kumimoji="1" lang="ja-JP" altLang="en-US" smtClean="0"/>
               <a:t>2026/7/30</a:t>
             </a:fld>
@@ -270,7 +270,7 @@
           <p:cNvPr id="5" name="フッター プレースホルダー 4">
             <a:extLst>
               <a:ext uri="{FF2B5EF4-FFF2-40B4-BE49-F238E27FC236}">
-                <a16:creationId xmlns:a16="http://schemas.microsoft.com/office/drawing/2014/main" id="{E632FC20-1854-0B5D-8E0E-4415F1C00F72}"/>
+                <a16:creationId xmlns:a16="http://schemas.microsoft.com/office/drawing/2014/main" id="{4E7A97E6-26B0-1BD9-3BDA-D98853AE856C}"/>
               </a:ext>
             </a:extLst>
           </p:cNvPr>
@@ -295,7 +295,7 @@
           <p:cNvPr id="6" name="スライド番号プレースホルダー 5">
             <a:extLst>
               <a:ext uri="{FF2B5EF4-FFF2-40B4-BE49-F238E27FC236}">
-                <a16:creationId xmlns:a16="http://schemas.microsoft.com/office/drawing/2014/main" id="{0EBF838D-AEBA-939D-90C1-687D38D97E07}"/>
+                <a16:creationId xmlns:a16="http://schemas.microsoft.com/office/drawing/2014/main" id="{1E44FAF7-4BEC-2886-903A-EC1FDE54B6ED}"/>
               </a:ext>
             </a:extLst>
           </p:cNvPr>
@@ -311,7 +311,7 @@
           <a:bodyPr/>
           <a:lstStyle/>
           <a:p>
-            <a:fld id="{475EA330-579B-47B0-8A9E-51FFEC34E67B}" type="slidenum">
+            <a:fld id="{AE2C703E-0CF4-40BE-9F3E-B1E910B497EA}" type="slidenum">
               <a:rPr kumimoji="1" lang="ja-JP" altLang="en-US" smtClean="0"/>
               <a:t>‹#›</a:t>
             </a:fld>
@@ -322,7 +322,7 @@
     </p:spTree>
     <p:extLst>
       <p:ext uri="{BB962C8B-B14F-4D97-AF65-F5344CB8AC3E}">
-        <p14:creationId xmlns:p14="http://schemas.microsoft.com/office/powerpoint/2010/main" val="2734718827"/>
+        <p14:creationId xmlns:p14="http://schemas.microsoft.com/office/powerpoint/2010/main" val="2279047403"/>
       </p:ext>
     </p:extLst>
   </p:cSld>
@@ -354,7 +354,7 @@
           <p:cNvPr id="2" name="タイトル 1">
             <a:extLst>
               <a:ext uri="{FF2B5EF4-FFF2-40B4-BE49-F238E27FC236}">
-                <a16:creationId xmlns:a16="http://schemas.microsoft.com/office/drawing/2014/main" id="{E1CDEE0F-B79D-E298-AAF8-C50B2B96FD80}"/>
+                <a16:creationId xmlns:a16="http://schemas.microsoft.com/office/drawing/2014/main" id="{DCD5B7AE-816C-CD3A-69FF-8C509D0B29A9}"/>
               </a:ext>
             </a:extLst>
           </p:cNvPr>
@@ -382,7 +382,7 @@
           <p:cNvPr id="3" name="縦書きテキスト プレースホルダー 2">
             <a:extLst>
               <a:ext uri="{FF2B5EF4-FFF2-40B4-BE49-F238E27FC236}">
-                <a16:creationId xmlns:a16="http://schemas.microsoft.com/office/drawing/2014/main" id="{8FC656E8-DFB2-12FF-A889-437F4D6E012A}"/>
+                <a16:creationId xmlns:a16="http://schemas.microsoft.com/office/drawing/2014/main" id="{FDD9F151-D522-DFEB-3EE3-B8B55B8E1F80}"/>
               </a:ext>
             </a:extLst>
           </p:cNvPr>
@@ -471,7 +471,7 @@
           <p:cNvPr id="4" name="日付プレースホルダー 3">
             <a:extLst>
               <a:ext uri="{FF2B5EF4-FFF2-40B4-BE49-F238E27FC236}">
-                <a16:creationId xmlns:a16="http://schemas.microsoft.com/office/drawing/2014/main" id="{CD0B9F00-7798-94F5-AA13-FF07A99ACEB1}"/>
+                <a16:creationId xmlns:a16="http://schemas.microsoft.com/office/drawing/2014/main" id="{C37862C7-64E6-17FC-FC24-729425428EB1}"/>
               </a:ext>
             </a:extLst>
           </p:cNvPr>
@@ -487,7 +487,7 @@
           <a:bodyPr/>
           <a:lstStyle/>
           <a:p>
-            <a:fld id="{D5A826E8-87E6-4C21-A3D7-962979163097}" type="datetimeFigureOut">
+            <a:fld id="{6F22473F-8440-407A-B58F-DBB6E30D6157}" type="datetimeFigureOut">
               <a:rPr kumimoji="1" lang="ja-JP" altLang="en-US" smtClean="0"/>
               <a:t>2026/7/30</a:t>
             </a:fld>
@@ -500,7 +500,7 @@
           <p:cNvPr id="5" name="フッター プレースホルダー 4">
             <a:extLst>
               <a:ext uri="{FF2B5EF4-FFF2-40B4-BE49-F238E27FC236}">
-                <a16:creationId xmlns:a16="http://schemas.microsoft.com/office/drawing/2014/main" id="{655BC89B-DDDB-39E3-6E53-2C51EE7CD039}"/>
+                <a16:creationId xmlns:a16="http://schemas.microsoft.com/office/drawing/2014/main" id="{C4F15E62-FD7F-06A0-E018-82C81EB43CCE}"/>
               </a:ext>
             </a:extLst>
           </p:cNvPr>
@@ -525,7 +525,7 @@
           <p:cNvPr id="6" name="スライド番号プレースホルダー 5">
             <a:extLst>
               <a:ext uri="{FF2B5EF4-FFF2-40B4-BE49-F238E27FC236}">
-                <a16:creationId xmlns:a16="http://schemas.microsoft.com/office/drawing/2014/main" id="{47EBC355-72DE-F840-6CFA-B3965FD5920F}"/>
+                <a16:creationId xmlns:a16="http://schemas.microsoft.com/office/drawing/2014/main" id="{C36883F8-7FED-6BB2-B3EE-FBE54BEA6EAE}"/>
               </a:ext>
             </a:extLst>
           </p:cNvPr>
@@ -541,7 +541,7 @@
           <a:bodyPr/>
           <a:lstStyle/>
           <a:p>
-            <a:fld id="{475EA330-579B-47B0-8A9E-51FFEC34E67B}" type="slidenum">
+            <a:fld id="{AE2C703E-0CF4-40BE-9F3E-B1E910B497EA}" type="slidenum">
               <a:rPr kumimoji="1" lang="ja-JP" altLang="en-US" smtClean="0"/>
               <a:t>‹#›</a:t>
             </a:fld>
@@ -552,7 +552,7 @@
     </p:spTree>
     <p:extLst>
       <p:ext uri="{BB962C8B-B14F-4D97-AF65-F5344CB8AC3E}">
-        <p14:creationId xmlns:p14="http://schemas.microsoft.com/office/powerpoint/2010/main" val="1969667499"/>
+        <p14:creationId xmlns:p14="http://schemas.microsoft.com/office/powerpoint/2010/main" val="2200624709"/>
       </p:ext>
     </p:extLst>
   </p:cSld>
@@ -584,7 +584,7 @@
           <p:cNvPr id="2" name="縦書きタイトル 1">
             <a:extLst>
               <a:ext uri="{FF2B5EF4-FFF2-40B4-BE49-F238E27FC236}">
-                <a16:creationId xmlns:a16="http://schemas.microsoft.com/office/drawing/2014/main" id="{536B5C49-0586-1610-56A0-05EC6A3EE0FF}"/>
+                <a16:creationId xmlns:a16="http://schemas.microsoft.com/office/drawing/2014/main" id="{12417BF9-DFB3-5BA4-923B-554C9E17FEE8}"/>
               </a:ext>
             </a:extLst>
           </p:cNvPr>
@@ -617,7 +617,7 @@
           <p:cNvPr id="3" name="縦書きテキスト プレースホルダー 2">
             <a:extLst>
               <a:ext uri="{FF2B5EF4-FFF2-40B4-BE49-F238E27FC236}">
-                <a16:creationId xmlns:a16="http://schemas.microsoft.com/office/drawing/2014/main" id="{1CB73ED1-7BF2-00D5-A8D3-8CF912E5BB7E}"/>
+                <a16:creationId xmlns:a16="http://schemas.microsoft.com/office/drawing/2014/main" id="{DA600A9B-8018-09B3-2261-D41F51DDF0A5}"/>
               </a:ext>
             </a:extLst>
           </p:cNvPr>
@@ -711,7 +711,7 @@
           <p:cNvPr id="4" name="日付プレースホルダー 3">
             <a:extLst>
               <a:ext uri="{FF2B5EF4-FFF2-40B4-BE49-F238E27FC236}">
-                <a16:creationId xmlns:a16="http://schemas.microsoft.com/office/drawing/2014/main" id="{085E6382-F11A-1B13-33EE-DFD4A6F4AAF6}"/>
+                <a16:creationId xmlns:a16="http://schemas.microsoft.com/office/drawing/2014/main" id="{C900D186-B9DE-7D9D-F5DA-B369E075EC64}"/>
               </a:ext>
             </a:extLst>
           </p:cNvPr>
@@ -727,7 +727,7 @@
           <a:bodyPr/>
           <a:lstStyle/>
           <a:p>
-            <a:fld id="{D5A826E8-87E6-4C21-A3D7-962979163097}" type="datetimeFigureOut">
+            <a:fld id="{6F22473F-8440-407A-B58F-DBB6E30D6157}" type="datetimeFigureOut">
               <a:rPr kumimoji="1" lang="ja-JP" altLang="en-US" smtClean="0"/>
               <a:t>2026/7/30</a:t>
             </a:fld>
@@ -740,7 +740,7 @@
           <p:cNvPr id="5" name="フッター プレースホルダー 4">
             <a:extLst>
               <a:ext uri="{FF2B5EF4-FFF2-40B4-BE49-F238E27FC236}">
-                <a16:creationId xmlns:a16="http://schemas.microsoft.com/office/drawing/2014/main" id="{23721C00-894C-C527-3ACB-4F71D684E5C9}"/>
+                <a16:creationId xmlns:a16="http://schemas.microsoft.com/office/drawing/2014/main" id="{EA2E4F6B-1124-AD2E-CCF9-3343A68BBB2E}"/>
               </a:ext>
             </a:extLst>
           </p:cNvPr>
@@ -765,7 +765,7 @@
           <p:cNvPr id="6" name="スライド番号プレースホルダー 5">
             <a:extLst>
               <a:ext uri="{FF2B5EF4-FFF2-40B4-BE49-F238E27FC236}">
-                <a16:creationId xmlns:a16="http://schemas.microsoft.com/office/drawing/2014/main" id="{3BC0610F-1A8D-8CFC-E0DB-96A216461D22}"/>
+                <a16:creationId xmlns:a16="http://schemas.microsoft.com/office/drawing/2014/main" id="{E6AC10FB-5D60-6DB7-CAD6-E7347CE254DC}"/>
               </a:ext>
             </a:extLst>
           </p:cNvPr>
@@ -781,7 +781,7 @@
           <a:bodyPr/>
           <a:lstStyle/>
           <a:p>
-            <a:fld id="{475EA330-579B-47B0-8A9E-51FFEC34E67B}" type="slidenum">
+            <a:fld id="{AE2C703E-0CF4-40BE-9F3E-B1E910B497EA}" type="slidenum">
               <a:rPr kumimoji="1" lang="ja-JP" altLang="en-US" smtClean="0"/>
               <a:t>‹#›</a:t>
             </a:fld>
@@ -792,7 +792,7 @@
     </p:spTree>
     <p:extLst>
       <p:ext uri="{BB962C8B-B14F-4D97-AF65-F5344CB8AC3E}">
-        <p14:creationId xmlns:p14="http://schemas.microsoft.com/office/powerpoint/2010/main" val="3918921849"/>
+        <p14:creationId xmlns:p14="http://schemas.microsoft.com/office/powerpoint/2010/main" val="1608601951"/>
       </p:ext>
     </p:extLst>
   </p:cSld>
@@ -824,7 +824,7 @@
           <p:cNvPr id="2" name="タイトル 1">
             <a:extLst>
               <a:ext uri="{FF2B5EF4-FFF2-40B4-BE49-F238E27FC236}">
-                <a16:creationId xmlns:a16="http://schemas.microsoft.com/office/drawing/2014/main" id="{0A6CEDA7-C455-7E86-7342-CA7F1FEFC199}"/>
+                <a16:creationId xmlns:a16="http://schemas.microsoft.com/office/drawing/2014/main" id="{DF732645-08FF-109F-2EA9-2D5923D84273}"/>
               </a:ext>
             </a:extLst>
           </p:cNvPr>
@@ -852,7 +852,7 @@
           <p:cNvPr id="3" name="コンテンツ プレースホルダー 2">
             <a:extLst>
               <a:ext uri="{FF2B5EF4-FFF2-40B4-BE49-F238E27FC236}">
-                <a16:creationId xmlns:a16="http://schemas.microsoft.com/office/drawing/2014/main" id="{4D103D37-9285-E7D0-2DE0-A8C4509113FB}"/>
+                <a16:creationId xmlns:a16="http://schemas.microsoft.com/office/drawing/2014/main" id="{96EE81D9-C540-2F40-5CFD-3CFA35CC87F7}"/>
               </a:ext>
             </a:extLst>
           </p:cNvPr>
@@ -941,7 +941,7 @@
           <p:cNvPr id="4" name="日付プレースホルダー 3">
             <a:extLst>
               <a:ext uri="{FF2B5EF4-FFF2-40B4-BE49-F238E27FC236}">
-                <a16:creationId xmlns:a16="http://schemas.microsoft.com/office/drawing/2014/main" id="{7A77D11E-592F-BA4C-D8C4-8707807960BC}"/>
+                <a16:creationId xmlns:a16="http://schemas.microsoft.com/office/drawing/2014/main" id="{D882D45F-7128-071C-E596-061981853068}"/>
               </a:ext>
             </a:extLst>
           </p:cNvPr>
@@ -957,7 +957,7 @@
           <a:bodyPr/>
           <a:lstStyle/>
           <a:p>
-            <a:fld id="{D5A826E8-87E6-4C21-A3D7-962979163097}" type="datetimeFigureOut">
+            <a:fld id="{6F22473F-8440-407A-B58F-DBB6E30D6157}" type="datetimeFigureOut">
               <a:rPr kumimoji="1" lang="ja-JP" altLang="en-US" smtClean="0"/>
               <a:t>2026/7/30</a:t>
             </a:fld>
@@ -970,7 +970,7 @@
           <p:cNvPr id="5" name="フッター プレースホルダー 4">
             <a:extLst>
               <a:ext uri="{FF2B5EF4-FFF2-40B4-BE49-F238E27FC236}">
-                <a16:creationId xmlns:a16="http://schemas.microsoft.com/office/drawing/2014/main" id="{346B06DD-4488-D753-5D44-748459254BFF}"/>
+                <a16:creationId xmlns:a16="http://schemas.microsoft.com/office/drawing/2014/main" id="{B7623F6F-00B6-3805-809D-1C6A84AFCAEA}"/>
               </a:ext>
             </a:extLst>
           </p:cNvPr>
@@ -995,7 +995,7 @@
           <p:cNvPr id="6" name="スライド番号プレースホルダー 5">
             <a:extLst>
               <a:ext uri="{FF2B5EF4-FFF2-40B4-BE49-F238E27FC236}">
-                <a16:creationId xmlns:a16="http://schemas.microsoft.com/office/drawing/2014/main" id="{11CF4967-D66E-6D19-1A76-9B60FA83FDE8}"/>
+                <a16:creationId xmlns:a16="http://schemas.microsoft.com/office/drawing/2014/main" id="{6EDEAC2E-E4AF-E613-226D-A6D726694EC0}"/>
               </a:ext>
             </a:extLst>
           </p:cNvPr>
@@ -1011,7 +1011,7 @@
           <a:bodyPr/>
           <a:lstStyle/>
           <a:p>
-            <a:fld id="{475EA330-579B-47B0-8A9E-51FFEC34E67B}" type="slidenum">
+            <a:fld id="{AE2C703E-0CF4-40BE-9F3E-B1E910B497EA}" type="slidenum">
               <a:rPr kumimoji="1" lang="ja-JP" altLang="en-US" smtClean="0"/>
               <a:t>‹#›</a:t>
             </a:fld>
@@ -1022,7 +1022,7 @@
     </p:spTree>
     <p:extLst>
       <p:ext uri="{BB962C8B-B14F-4D97-AF65-F5344CB8AC3E}">
-        <p14:creationId xmlns:p14="http://schemas.microsoft.com/office/powerpoint/2010/main" val="1663587954"/>
+        <p14:creationId xmlns:p14="http://schemas.microsoft.com/office/powerpoint/2010/main" val="3833184727"/>
       </p:ext>
     </p:extLst>
   </p:cSld>
@@ -1054,7 +1054,7 @@
           <p:cNvPr id="2" name="タイトル 1">
             <a:extLst>
               <a:ext uri="{FF2B5EF4-FFF2-40B4-BE49-F238E27FC236}">
-                <a16:creationId xmlns:a16="http://schemas.microsoft.com/office/drawing/2014/main" id="{A7148FB9-AD04-BD47-9583-BD4E4397B521}"/>
+                <a16:creationId xmlns:a16="http://schemas.microsoft.com/office/drawing/2014/main" id="{C81756B6-FC19-0FD9-78CA-78E639A2AFE0}"/>
               </a:ext>
             </a:extLst>
           </p:cNvPr>
@@ -1091,7 +1091,7 @@
           <p:cNvPr id="3" name="テキスト プレースホルダー 2">
             <a:extLst>
               <a:ext uri="{FF2B5EF4-FFF2-40B4-BE49-F238E27FC236}">
-                <a16:creationId xmlns:a16="http://schemas.microsoft.com/office/drawing/2014/main" id="{83C6CC64-18EE-9F10-E356-A0BAE30ED8DC}"/>
+                <a16:creationId xmlns:a16="http://schemas.microsoft.com/office/drawing/2014/main" id="{C152CA9C-1E9B-0337-20A0-FBEDBF352BD7}"/>
               </a:ext>
             </a:extLst>
           </p:cNvPr>
@@ -1216,7 +1216,7 @@
           <p:cNvPr id="4" name="日付プレースホルダー 3">
             <a:extLst>
               <a:ext uri="{FF2B5EF4-FFF2-40B4-BE49-F238E27FC236}">
-                <a16:creationId xmlns:a16="http://schemas.microsoft.com/office/drawing/2014/main" id="{1765F49E-844B-7C38-6C04-EAF296F951C4}"/>
+                <a16:creationId xmlns:a16="http://schemas.microsoft.com/office/drawing/2014/main" id="{6A54073F-8B7D-9F63-A144-CBF5B566C300}"/>
               </a:ext>
             </a:extLst>
           </p:cNvPr>
@@ -1232,7 +1232,7 @@
           <a:bodyPr/>
           <a:lstStyle/>
           <a:p>
-            <a:fld id="{D5A826E8-87E6-4C21-A3D7-962979163097}" type="datetimeFigureOut">
+            <a:fld id="{6F22473F-8440-407A-B58F-DBB6E30D6157}" type="datetimeFigureOut">
               <a:rPr kumimoji="1" lang="ja-JP" altLang="en-US" smtClean="0"/>
               <a:t>2026/7/30</a:t>
             </a:fld>
@@ -1245,7 +1245,7 @@
           <p:cNvPr id="5" name="フッター プレースホルダー 4">
             <a:extLst>
               <a:ext uri="{FF2B5EF4-FFF2-40B4-BE49-F238E27FC236}">
-                <a16:creationId xmlns:a16="http://schemas.microsoft.com/office/drawing/2014/main" id="{2D2574A3-86E8-158D-A91F-AA288EE9312A}"/>
+                <a16:creationId xmlns:a16="http://schemas.microsoft.com/office/drawing/2014/main" id="{3D2D05FE-16F1-D343-1CDC-82235C8AA5AA}"/>
               </a:ext>
             </a:extLst>
           </p:cNvPr>
@@ -1270,7 +1270,7 @@
           <p:cNvPr id="6" name="スライド番号プレースホルダー 5">
             <a:extLst>
               <a:ext uri="{FF2B5EF4-FFF2-40B4-BE49-F238E27FC236}">
-                <a16:creationId xmlns:a16="http://schemas.microsoft.com/office/drawing/2014/main" id="{EEA84924-4BBE-F276-4714-ED962EECD388}"/>
+                <a16:creationId xmlns:a16="http://schemas.microsoft.com/office/drawing/2014/main" id="{1CCBF333-0B46-0442-5343-74542E819864}"/>
               </a:ext>
             </a:extLst>
           </p:cNvPr>
@@ -1286,7 +1286,7 @@
           <a:bodyPr/>
           <a:lstStyle/>
           <a:p>
-            <a:fld id="{475EA330-579B-47B0-8A9E-51FFEC34E67B}" type="slidenum">
+            <a:fld id="{AE2C703E-0CF4-40BE-9F3E-B1E910B497EA}" type="slidenum">
               <a:rPr kumimoji="1" lang="ja-JP" altLang="en-US" smtClean="0"/>
               <a:t>‹#›</a:t>
             </a:fld>
@@ -1297,7 +1297,7 @@
     </p:spTree>
     <p:extLst>
       <p:ext uri="{BB962C8B-B14F-4D97-AF65-F5344CB8AC3E}">
-        <p14:creationId xmlns:p14="http://schemas.microsoft.com/office/powerpoint/2010/main" val="519318872"/>
+        <p14:creationId xmlns:p14="http://schemas.microsoft.com/office/powerpoint/2010/main" val="915606435"/>
       </p:ext>
     </p:extLst>
   </p:cSld>
@@ -1329,7 +1329,7 @@
           <p:cNvPr id="2" name="タイトル 1">
             <a:extLst>
               <a:ext uri="{FF2B5EF4-FFF2-40B4-BE49-F238E27FC236}">
-                <a16:creationId xmlns:a16="http://schemas.microsoft.com/office/drawing/2014/main" id="{6165478C-1EB0-66F8-0AD7-5E51B5DECDA3}"/>
+                <a16:creationId xmlns:a16="http://schemas.microsoft.com/office/drawing/2014/main" id="{11A7EEF4-5209-818C-1CBA-285CE5385DC8}"/>
               </a:ext>
             </a:extLst>
           </p:cNvPr>
@@ -1357,7 +1357,7 @@
           <p:cNvPr id="3" name="コンテンツ プレースホルダー 2">
             <a:extLst>
               <a:ext uri="{FF2B5EF4-FFF2-40B4-BE49-F238E27FC236}">
-                <a16:creationId xmlns:a16="http://schemas.microsoft.com/office/drawing/2014/main" id="{27209125-5AD5-235D-1A3C-6D426D68D671}"/>
+                <a16:creationId xmlns:a16="http://schemas.microsoft.com/office/drawing/2014/main" id="{6C87B552-44FA-7E7F-9D0F-FFDFCAF7006E}"/>
               </a:ext>
             </a:extLst>
           </p:cNvPr>
@@ -1451,7 +1451,7 @@
           <p:cNvPr id="4" name="コンテンツ プレースホルダー 3">
             <a:extLst>
               <a:ext uri="{FF2B5EF4-FFF2-40B4-BE49-F238E27FC236}">
-                <a16:creationId xmlns:a16="http://schemas.microsoft.com/office/drawing/2014/main" id="{3277A914-BE23-A914-1607-50B93CA54DE3}"/>
+                <a16:creationId xmlns:a16="http://schemas.microsoft.com/office/drawing/2014/main" id="{1497C180-7C6E-2A51-7E50-B0BC612A29D5}"/>
               </a:ext>
             </a:extLst>
           </p:cNvPr>
@@ -1545,7 +1545,7 @@
           <p:cNvPr id="5" name="日付プレースホルダー 4">
             <a:extLst>
               <a:ext uri="{FF2B5EF4-FFF2-40B4-BE49-F238E27FC236}">
-                <a16:creationId xmlns:a16="http://schemas.microsoft.com/office/drawing/2014/main" id="{4A773D6A-0166-0E38-C884-723A97937D47}"/>
+                <a16:creationId xmlns:a16="http://schemas.microsoft.com/office/drawing/2014/main" id="{6A738C31-97F9-5B4B-8C9E-9383C92C45DE}"/>
               </a:ext>
             </a:extLst>
           </p:cNvPr>
@@ -1561,7 +1561,7 @@
           <a:bodyPr/>
           <a:lstStyle/>
           <a:p>
-            <a:fld id="{D5A826E8-87E6-4C21-A3D7-962979163097}" type="datetimeFigureOut">
+            <a:fld id="{6F22473F-8440-407A-B58F-DBB6E30D6157}" type="datetimeFigureOut">
               <a:rPr kumimoji="1" lang="ja-JP" altLang="en-US" smtClean="0"/>
               <a:t>2026/7/30</a:t>
             </a:fld>
@@ -1574,7 +1574,7 @@
           <p:cNvPr id="6" name="フッター プレースホルダー 5">
             <a:extLst>
               <a:ext uri="{FF2B5EF4-FFF2-40B4-BE49-F238E27FC236}">
-                <a16:creationId xmlns:a16="http://schemas.microsoft.com/office/drawing/2014/main" id="{A6D31D90-322B-01B4-50B3-A07B3002F934}"/>
+                <a16:creationId xmlns:a16="http://schemas.microsoft.com/office/drawing/2014/main" id="{995BE2C9-B390-29C5-C3E8-4D68B1D42CF5}"/>
               </a:ext>
             </a:extLst>
           </p:cNvPr>
@@ -1599,7 +1599,7 @@
           <p:cNvPr id="7" name="スライド番号プレースホルダー 6">
             <a:extLst>
               <a:ext uri="{FF2B5EF4-FFF2-40B4-BE49-F238E27FC236}">
-                <a16:creationId xmlns:a16="http://schemas.microsoft.com/office/drawing/2014/main" id="{821E6AEB-D217-5646-1DC0-1AC3A2F136A6}"/>
+                <a16:creationId xmlns:a16="http://schemas.microsoft.com/office/drawing/2014/main" id="{C53B5EE0-5B70-CEC4-B9B3-2F2FAD07A5A5}"/>
               </a:ext>
             </a:extLst>
           </p:cNvPr>
@@ -1615,7 +1615,7 @@
           <a:bodyPr/>
           <a:lstStyle/>
           <a:p>
-            <a:fld id="{475EA330-579B-47B0-8A9E-51FFEC34E67B}" type="slidenum">
+            <a:fld id="{AE2C703E-0CF4-40BE-9F3E-B1E910B497EA}" type="slidenum">
               <a:rPr kumimoji="1" lang="ja-JP" altLang="en-US" smtClean="0"/>
               <a:t>‹#›</a:t>
             </a:fld>
@@ -1626,7 +1626,7 @@
     </p:spTree>
     <p:extLst>
       <p:ext uri="{BB962C8B-B14F-4D97-AF65-F5344CB8AC3E}">
-        <p14:creationId xmlns:p14="http://schemas.microsoft.com/office/powerpoint/2010/main" val="3009195101"/>
+        <p14:creationId xmlns:p14="http://schemas.microsoft.com/office/powerpoint/2010/main" val="66896148"/>
       </p:ext>
     </p:extLst>
   </p:cSld>
@@ -1658,7 +1658,7 @@
           <p:cNvPr id="2" name="タイトル 1">
             <a:extLst>
               <a:ext uri="{FF2B5EF4-FFF2-40B4-BE49-F238E27FC236}">
-                <a16:creationId xmlns:a16="http://schemas.microsoft.com/office/drawing/2014/main" id="{9E582F90-B2B9-1DD7-D02F-2C54CB720EC4}"/>
+                <a16:creationId xmlns:a16="http://schemas.microsoft.com/office/drawing/2014/main" id="{69808039-661B-1076-0D56-86BB19EF6E58}"/>
               </a:ext>
             </a:extLst>
           </p:cNvPr>
@@ -1691,7 +1691,7 @@
           <p:cNvPr id="3" name="テキスト プレースホルダー 2">
             <a:extLst>
               <a:ext uri="{FF2B5EF4-FFF2-40B4-BE49-F238E27FC236}">
-                <a16:creationId xmlns:a16="http://schemas.microsoft.com/office/drawing/2014/main" id="{2073E153-A106-B1A8-54D6-31A06CAF7868}"/>
+                <a16:creationId xmlns:a16="http://schemas.microsoft.com/office/drawing/2014/main" id="{FC535E84-54DE-4C72-23B8-AC6C9101961A}"/>
               </a:ext>
             </a:extLst>
           </p:cNvPr>
@@ -1762,7 +1762,7 @@
           <p:cNvPr id="4" name="コンテンツ プレースホルダー 3">
             <a:extLst>
               <a:ext uri="{FF2B5EF4-FFF2-40B4-BE49-F238E27FC236}">
-                <a16:creationId xmlns:a16="http://schemas.microsoft.com/office/drawing/2014/main" id="{921DC6F6-AF46-BAF8-7D88-22BD9403D87B}"/>
+                <a16:creationId xmlns:a16="http://schemas.microsoft.com/office/drawing/2014/main" id="{DC3A8C6A-20E3-8C94-2DFF-0AA954576B10}"/>
               </a:ext>
             </a:extLst>
           </p:cNvPr>
@@ -1856,7 +1856,7 @@
           <p:cNvPr id="5" name="テキスト プレースホルダー 4">
             <a:extLst>
               <a:ext uri="{FF2B5EF4-FFF2-40B4-BE49-F238E27FC236}">
-                <a16:creationId xmlns:a16="http://schemas.microsoft.com/office/drawing/2014/main" id="{ED5B82CB-82A2-0CD6-8665-53067A4D4E42}"/>
+                <a16:creationId xmlns:a16="http://schemas.microsoft.com/office/drawing/2014/main" id="{BAED2A38-2158-B1B2-9ABF-4532ACCFB9C2}"/>
               </a:ext>
             </a:extLst>
           </p:cNvPr>
@@ -1927,7 +1927,7 @@
           <p:cNvPr id="6" name="コンテンツ プレースホルダー 5">
             <a:extLst>
               <a:ext uri="{FF2B5EF4-FFF2-40B4-BE49-F238E27FC236}">
-                <a16:creationId xmlns:a16="http://schemas.microsoft.com/office/drawing/2014/main" id="{70BB1CF1-BA90-185E-2890-3552295DFFFB}"/>
+                <a16:creationId xmlns:a16="http://schemas.microsoft.com/office/drawing/2014/main" id="{FC38DBA1-1B6D-13CF-8927-EBF058CCC35E}"/>
               </a:ext>
             </a:extLst>
           </p:cNvPr>
@@ -2021,7 +2021,7 @@
           <p:cNvPr id="7" name="日付プレースホルダー 6">
             <a:extLst>
               <a:ext uri="{FF2B5EF4-FFF2-40B4-BE49-F238E27FC236}">
-                <a16:creationId xmlns:a16="http://schemas.microsoft.com/office/drawing/2014/main" id="{BF96CA45-D560-7921-783B-BC384D631AC3}"/>
+                <a16:creationId xmlns:a16="http://schemas.microsoft.com/office/drawing/2014/main" id="{048BE390-194A-FAB8-F6A5-2A55CB7AA899}"/>
               </a:ext>
             </a:extLst>
           </p:cNvPr>
@@ -2037,7 +2037,7 @@
           <a:bodyPr/>
           <a:lstStyle/>
           <a:p>
-            <a:fld id="{D5A826E8-87E6-4C21-A3D7-962979163097}" type="datetimeFigureOut">
+            <a:fld id="{6F22473F-8440-407A-B58F-DBB6E30D6157}" type="datetimeFigureOut">
               <a:rPr kumimoji="1" lang="ja-JP" altLang="en-US" smtClean="0"/>
               <a:t>2026/7/30</a:t>
             </a:fld>
@@ -2050,7 +2050,7 @@
           <p:cNvPr id="8" name="フッター プレースホルダー 7">
             <a:extLst>
               <a:ext uri="{FF2B5EF4-FFF2-40B4-BE49-F238E27FC236}">
-                <a16:creationId xmlns:a16="http://schemas.microsoft.com/office/drawing/2014/main" id="{67A535F9-2C1D-DB76-50D5-793DAE992B98}"/>
+                <a16:creationId xmlns:a16="http://schemas.microsoft.com/office/drawing/2014/main" id="{1C26B3E5-F23A-0F48-CED0-22874505CA0D}"/>
               </a:ext>
             </a:extLst>
           </p:cNvPr>
@@ -2075,7 +2075,7 @@
           <p:cNvPr id="9" name="スライド番号プレースホルダー 8">
             <a:extLst>
               <a:ext uri="{FF2B5EF4-FFF2-40B4-BE49-F238E27FC236}">
-                <a16:creationId xmlns:a16="http://schemas.microsoft.com/office/drawing/2014/main" id="{16B01851-5E60-F71D-66C4-9F459FCA65CE}"/>
+                <a16:creationId xmlns:a16="http://schemas.microsoft.com/office/drawing/2014/main" id="{5BE5984F-3932-6352-5D77-3A91558E91B8}"/>
               </a:ext>
             </a:extLst>
           </p:cNvPr>
@@ -2091,7 +2091,7 @@
           <a:bodyPr/>
           <a:lstStyle/>
           <a:p>
-            <a:fld id="{475EA330-579B-47B0-8A9E-51FFEC34E67B}" type="slidenum">
+            <a:fld id="{AE2C703E-0CF4-40BE-9F3E-B1E910B497EA}" type="slidenum">
               <a:rPr kumimoji="1" lang="ja-JP" altLang="en-US" smtClean="0"/>
               <a:t>‹#›</a:t>
             </a:fld>
@@ -2102,7 +2102,7 @@
     </p:spTree>
     <p:extLst>
       <p:ext uri="{BB962C8B-B14F-4D97-AF65-F5344CB8AC3E}">
-        <p14:creationId xmlns:p14="http://schemas.microsoft.com/office/powerpoint/2010/main" val="1850452260"/>
+        <p14:creationId xmlns:p14="http://schemas.microsoft.com/office/powerpoint/2010/main" val="3013523150"/>
       </p:ext>
     </p:extLst>
   </p:cSld>
@@ -2134,7 +2134,7 @@
           <p:cNvPr id="2" name="タイトル 1">
             <a:extLst>
               <a:ext uri="{FF2B5EF4-FFF2-40B4-BE49-F238E27FC236}">
-                <a16:creationId xmlns:a16="http://schemas.microsoft.com/office/drawing/2014/main" id="{976B4044-0634-6991-DC59-8A02AF51DC18}"/>
+                <a16:creationId xmlns:a16="http://schemas.microsoft.com/office/drawing/2014/main" id="{8A5C4577-636A-23E2-F1AC-8B9C5E174B50}"/>
               </a:ext>
             </a:extLst>
           </p:cNvPr>
@@ -2162,7 +2162,7 @@
           <p:cNvPr id="3" name="日付プレースホルダー 2">
             <a:extLst>
               <a:ext uri="{FF2B5EF4-FFF2-40B4-BE49-F238E27FC236}">
-                <a16:creationId xmlns:a16="http://schemas.microsoft.com/office/drawing/2014/main" id="{A818433B-0AA5-4B73-B238-F37580E5A479}"/>
+                <a16:creationId xmlns:a16="http://schemas.microsoft.com/office/drawing/2014/main" id="{8FCB6D00-0F27-E7A0-7DD5-6E692FEA64E4}"/>
               </a:ext>
             </a:extLst>
           </p:cNvPr>
@@ -2178,7 +2178,7 @@
           <a:bodyPr/>
           <a:lstStyle/>
           <a:p>
-            <a:fld id="{D5A826E8-87E6-4C21-A3D7-962979163097}" type="datetimeFigureOut">
+            <a:fld id="{6F22473F-8440-407A-B58F-DBB6E30D6157}" type="datetimeFigureOut">
               <a:rPr kumimoji="1" lang="ja-JP" altLang="en-US" smtClean="0"/>
               <a:t>2026/7/30</a:t>
             </a:fld>
@@ -2191,7 +2191,7 @@
           <p:cNvPr id="4" name="フッター プレースホルダー 3">
             <a:extLst>
               <a:ext uri="{FF2B5EF4-FFF2-40B4-BE49-F238E27FC236}">
-                <a16:creationId xmlns:a16="http://schemas.microsoft.com/office/drawing/2014/main" id="{DAFB10FB-B1BD-60F8-3BE3-E6027B504527}"/>
+                <a16:creationId xmlns:a16="http://schemas.microsoft.com/office/drawing/2014/main" id="{678DA96F-BAC1-5DFD-2657-77D1A44B4A76}"/>
               </a:ext>
             </a:extLst>
           </p:cNvPr>
@@ -2216,7 +2216,7 @@
           <p:cNvPr id="5" name="スライド番号プレースホルダー 4">
             <a:extLst>
               <a:ext uri="{FF2B5EF4-FFF2-40B4-BE49-F238E27FC236}">
-                <a16:creationId xmlns:a16="http://schemas.microsoft.com/office/drawing/2014/main" id="{764ACF9E-2928-41C7-22D1-D5B709B43856}"/>
+                <a16:creationId xmlns:a16="http://schemas.microsoft.com/office/drawing/2014/main" id="{D7CC7274-12AF-9277-A8CC-FE1460641DF3}"/>
               </a:ext>
             </a:extLst>
           </p:cNvPr>
@@ -2232,7 +2232,7 @@
           <a:bodyPr/>
           <a:lstStyle/>
           <a:p>
-            <a:fld id="{475EA330-579B-47B0-8A9E-51FFEC34E67B}" type="slidenum">
+            <a:fld id="{AE2C703E-0CF4-40BE-9F3E-B1E910B497EA}" type="slidenum">
               <a:rPr kumimoji="1" lang="ja-JP" altLang="en-US" smtClean="0"/>
               <a:t>‹#›</a:t>
             </a:fld>
@@ -2243,7 +2243,7 @@
     </p:spTree>
     <p:extLst>
       <p:ext uri="{BB962C8B-B14F-4D97-AF65-F5344CB8AC3E}">
-        <p14:creationId xmlns:p14="http://schemas.microsoft.com/office/powerpoint/2010/main" val="1165949261"/>
+        <p14:creationId xmlns:p14="http://schemas.microsoft.com/office/powerpoint/2010/main" val="2377730519"/>
       </p:ext>
     </p:extLst>
   </p:cSld>
@@ -2275,7 +2275,7 @@
           <p:cNvPr id="2" name="日付プレースホルダー 1">
             <a:extLst>
               <a:ext uri="{FF2B5EF4-FFF2-40B4-BE49-F238E27FC236}">
-                <a16:creationId xmlns:a16="http://schemas.microsoft.com/office/drawing/2014/main" id="{D1D7E440-32D3-F595-264F-7726D4F7A455}"/>
+                <a16:creationId xmlns:a16="http://schemas.microsoft.com/office/drawing/2014/main" id="{84E99404-449A-81F9-33AA-8DC63F385156}"/>
               </a:ext>
             </a:extLst>
           </p:cNvPr>
@@ -2291,7 +2291,7 @@
           <a:bodyPr/>
           <a:lstStyle/>
           <a:p>
-            <a:fld id="{D5A826E8-87E6-4C21-A3D7-962979163097}" type="datetimeFigureOut">
+            <a:fld id="{6F22473F-8440-407A-B58F-DBB6E30D6157}" type="datetimeFigureOut">
               <a:rPr kumimoji="1" lang="ja-JP" altLang="en-US" smtClean="0"/>
               <a:t>2026/7/30</a:t>
             </a:fld>
@@ -2304,7 +2304,7 @@
           <p:cNvPr id="3" name="フッター プレースホルダー 2">
             <a:extLst>
               <a:ext uri="{FF2B5EF4-FFF2-40B4-BE49-F238E27FC236}">
-                <a16:creationId xmlns:a16="http://schemas.microsoft.com/office/drawing/2014/main" id="{29D6F1E5-BE3D-5474-58F1-0E82EE266534}"/>
+                <a16:creationId xmlns:a16="http://schemas.microsoft.com/office/drawing/2014/main" id="{110FCFC2-C5B3-09DE-0F95-53B330F5F18B}"/>
               </a:ext>
             </a:extLst>
           </p:cNvPr>
@@ -2329,7 +2329,7 @@
           <p:cNvPr id="4" name="スライド番号プレースホルダー 3">
             <a:extLst>
               <a:ext uri="{FF2B5EF4-FFF2-40B4-BE49-F238E27FC236}">
-                <a16:creationId xmlns:a16="http://schemas.microsoft.com/office/drawing/2014/main" id="{F323F198-2795-E07B-9430-008AECB24A3E}"/>
+                <a16:creationId xmlns:a16="http://schemas.microsoft.com/office/drawing/2014/main" id="{0A3ED3BF-29B7-01E1-92DA-A9D864BD23BF}"/>
               </a:ext>
             </a:extLst>
           </p:cNvPr>
@@ -2345,7 +2345,7 @@
           <a:bodyPr/>
           <a:lstStyle/>
           <a:p>
-            <a:fld id="{475EA330-579B-47B0-8A9E-51FFEC34E67B}" type="slidenum">
+            <a:fld id="{AE2C703E-0CF4-40BE-9F3E-B1E910B497EA}" type="slidenum">
               <a:rPr kumimoji="1" lang="ja-JP" altLang="en-US" smtClean="0"/>
               <a:t>‹#›</a:t>
             </a:fld>
@@ -2356,7 +2356,7 @@
     </p:spTree>
     <p:extLst>
       <p:ext uri="{BB962C8B-B14F-4D97-AF65-F5344CB8AC3E}">
-        <p14:creationId xmlns:p14="http://schemas.microsoft.com/office/powerpoint/2010/main" val="1243097970"/>
+        <p14:creationId xmlns:p14="http://schemas.microsoft.com/office/powerpoint/2010/main" val="1575824875"/>
       </p:ext>
     </p:extLst>
   </p:cSld>
@@ -2388,7 +2388,7 @@
           <p:cNvPr id="2" name="タイトル 1">
             <a:extLst>
               <a:ext uri="{FF2B5EF4-FFF2-40B4-BE49-F238E27FC236}">
-                <a16:creationId xmlns:a16="http://schemas.microsoft.com/office/drawing/2014/main" id="{7915A50D-2D4B-B7F6-ABC2-7336DB4A4C28}"/>
+                <a16:creationId xmlns:a16="http://schemas.microsoft.com/office/drawing/2014/main" id="{D1AC5263-0E51-D4DC-246A-DD8922FD8E8F}"/>
               </a:ext>
             </a:extLst>
           </p:cNvPr>
@@ -2425,7 +2425,7 @@
           <p:cNvPr id="3" name="コンテンツ プレースホルダー 2">
             <a:extLst>
               <a:ext uri="{FF2B5EF4-FFF2-40B4-BE49-F238E27FC236}">
-                <a16:creationId xmlns:a16="http://schemas.microsoft.com/office/drawing/2014/main" id="{663BD0D7-9224-1F14-548E-66A0B44311D9}"/>
+                <a16:creationId xmlns:a16="http://schemas.microsoft.com/office/drawing/2014/main" id="{60FC70AF-129F-9EE3-1234-53162E9D5A54}"/>
               </a:ext>
             </a:extLst>
           </p:cNvPr>
@@ -2547,7 +2547,7 @@
           <p:cNvPr id="4" name="テキスト プレースホルダー 3">
             <a:extLst>
               <a:ext uri="{FF2B5EF4-FFF2-40B4-BE49-F238E27FC236}">
-                <a16:creationId xmlns:a16="http://schemas.microsoft.com/office/drawing/2014/main" id="{CB67495C-5202-08F3-A463-09AA36EF31C0}"/>
+                <a16:creationId xmlns:a16="http://schemas.microsoft.com/office/drawing/2014/main" id="{FA2313C9-1C32-0C77-BF6E-5B4D38837F38}"/>
               </a:ext>
             </a:extLst>
           </p:cNvPr>
@@ -2618,7 +2618,7 @@
           <p:cNvPr id="5" name="日付プレースホルダー 4">
             <a:extLst>
               <a:ext uri="{FF2B5EF4-FFF2-40B4-BE49-F238E27FC236}">
-                <a16:creationId xmlns:a16="http://schemas.microsoft.com/office/drawing/2014/main" id="{5549C42F-9FA4-4876-A8E3-2A039970A3FE}"/>
+                <a16:creationId xmlns:a16="http://schemas.microsoft.com/office/drawing/2014/main" id="{D261D464-8937-ACD2-CB7D-DDF675B1C1C3}"/>
               </a:ext>
             </a:extLst>
           </p:cNvPr>
@@ -2634,7 +2634,7 @@
           <a:bodyPr/>
           <a:lstStyle/>
           <a:p>
-            <a:fld id="{D5A826E8-87E6-4C21-A3D7-962979163097}" type="datetimeFigureOut">
+            <a:fld id="{6F22473F-8440-407A-B58F-DBB6E30D6157}" type="datetimeFigureOut">
               <a:rPr kumimoji="1" lang="ja-JP" altLang="en-US" smtClean="0"/>
               <a:t>2026/7/30</a:t>
             </a:fld>
@@ -2647,7 +2647,7 @@
           <p:cNvPr id="6" name="フッター プレースホルダー 5">
             <a:extLst>
               <a:ext uri="{FF2B5EF4-FFF2-40B4-BE49-F238E27FC236}">
-                <a16:creationId xmlns:a16="http://schemas.microsoft.com/office/drawing/2014/main" id="{00D639BF-B8B3-3295-AC51-FDD52120722A}"/>
+                <a16:creationId xmlns:a16="http://schemas.microsoft.com/office/drawing/2014/main" id="{C92258AF-2C06-85CA-079B-F2B24040D00D}"/>
               </a:ext>
             </a:extLst>
           </p:cNvPr>
@@ -2672,7 +2672,7 @@
           <p:cNvPr id="7" name="スライド番号プレースホルダー 6">
             <a:extLst>
               <a:ext uri="{FF2B5EF4-FFF2-40B4-BE49-F238E27FC236}">
-                <a16:creationId xmlns:a16="http://schemas.microsoft.com/office/drawing/2014/main" id="{D6677840-3D36-5AEE-F37F-20979C2B9425}"/>
+                <a16:creationId xmlns:a16="http://schemas.microsoft.com/office/drawing/2014/main" id="{350A381B-DB12-768D-2898-9989322A4F70}"/>
               </a:ext>
             </a:extLst>
           </p:cNvPr>
@@ -2688,7 +2688,7 @@
           <a:bodyPr/>
           <a:lstStyle/>
           <a:p>
-            <a:fld id="{475EA330-579B-47B0-8A9E-51FFEC34E67B}" type="slidenum">
+            <a:fld id="{AE2C703E-0CF4-40BE-9F3E-B1E910B497EA}" type="slidenum">
               <a:rPr kumimoji="1" lang="ja-JP" altLang="en-US" smtClean="0"/>
               <a:t>‹#›</a:t>
             </a:fld>
@@ -2699,7 +2699,7 @@
     </p:spTree>
     <p:extLst>
       <p:ext uri="{BB962C8B-B14F-4D97-AF65-F5344CB8AC3E}">
-        <p14:creationId xmlns:p14="http://schemas.microsoft.com/office/powerpoint/2010/main" val="3750169455"/>
+        <p14:creationId xmlns:p14="http://schemas.microsoft.com/office/powerpoint/2010/main" val="3503186345"/>
       </p:ext>
     </p:extLst>
   </p:cSld>
@@ -2731,7 +2731,7 @@
           <p:cNvPr id="2" name="タイトル 1">
             <a:extLst>
               <a:ext uri="{FF2B5EF4-FFF2-40B4-BE49-F238E27FC236}">
-                <a16:creationId xmlns:a16="http://schemas.microsoft.com/office/drawing/2014/main" id="{4C7ACF22-9AE8-E374-C6AC-B254F17584B8}"/>
+                <a16:creationId xmlns:a16="http://schemas.microsoft.com/office/drawing/2014/main" id="{0C291204-7CF2-C4C2-3BFF-6B48EB2CF336}"/>
               </a:ext>
             </a:extLst>
           </p:cNvPr>
@@ -2768,7 +2768,7 @@
           <p:cNvPr id="3" name="図プレースホルダー 2">
             <a:extLst>
               <a:ext uri="{FF2B5EF4-FFF2-40B4-BE49-F238E27FC236}">
-                <a16:creationId xmlns:a16="http://schemas.microsoft.com/office/drawing/2014/main" id="{9DD083AF-ED16-45FD-5313-9EA0C7218B2F}"/>
+                <a16:creationId xmlns:a16="http://schemas.microsoft.com/office/drawing/2014/main" id="{99504977-F5C8-0CA7-DF3E-854821D96584}"/>
               </a:ext>
             </a:extLst>
           </p:cNvPr>
@@ -2835,7 +2835,7 @@
           <p:cNvPr id="4" name="テキスト プレースホルダー 3">
             <a:extLst>
               <a:ext uri="{FF2B5EF4-FFF2-40B4-BE49-F238E27FC236}">
-                <a16:creationId xmlns:a16="http://schemas.microsoft.com/office/drawing/2014/main" id="{7A0C3616-E986-A415-9506-BD08D3225DDB}"/>
+                <a16:creationId xmlns:a16="http://schemas.microsoft.com/office/drawing/2014/main" id="{DCA0C5AB-8236-3546-F15C-AED16AB9989A}"/>
               </a:ext>
             </a:extLst>
           </p:cNvPr>
@@ -2906,7 +2906,7 @@
           <p:cNvPr id="5" name="日付プレースホルダー 4">
             <a:extLst>
               <a:ext uri="{FF2B5EF4-FFF2-40B4-BE49-F238E27FC236}">
-                <a16:creationId xmlns:a16="http://schemas.microsoft.com/office/drawing/2014/main" id="{B81FCB62-7450-D8C1-D0F4-2784B5A867B1}"/>
+                <a16:creationId xmlns:a16="http://schemas.microsoft.com/office/drawing/2014/main" id="{EC4F309E-7A10-66D9-0028-71ABFA668BDF}"/>
               </a:ext>
             </a:extLst>
           </p:cNvPr>
@@ -2922,7 +2922,7 @@
           <a:bodyPr/>
           <a:lstStyle/>
           <a:p>
-            <a:fld id="{D5A826E8-87E6-4C21-A3D7-962979163097}" type="datetimeFigureOut">
+            <a:fld id="{6F22473F-8440-407A-B58F-DBB6E30D6157}" type="datetimeFigureOut">
               <a:rPr kumimoji="1" lang="ja-JP" altLang="en-US" smtClean="0"/>
               <a:t>2026/7/30</a:t>
             </a:fld>
@@ -2935,7 +2935,7 @@
           <p:cNvPr id="6" name="フッター プレースホルダー 5">
             <a:extLst>
               <a:ext uri="{FF2B5EF4-FFF2-40B4-BE49-F238E27FC236}">
-                <a16:creationId xmlns:a16="http://schemas.microsoft.com/office/drawing/2014/main" id="{E844DE9F-51B2-40D1-EEA9-4A3722A719E5}"/>
+                <a16:creationId xmlns:a16="http://schemas.microsoft.com/office/drawing/2014/main" id="{CEE061D1-F8A7-3504-6C07-21DAB14BBC09}"/>
               </a:ext>
             </a:extLst>
           </p:cNvPr>
@@ -2960,7 +2960,7 @@
           <p:cNvPr id="7" name="スライド番号プレースホルダー 6">
             <a:extLst>
               <a:ext uri="{FF2B5EF4-FFF2-40B4-BE49-F238E27FC236}">
-                <a16:creationId xmlns:a16="http://schemas.microsoft.com/office/drawing/2014/main" id="{F7EC886A-BCC6-4C7F-5448-931C4B24E53A}"/>
+                <a16:creationId xmlns:a16="http://schemas.microsoft.com/office/drawing/2014/main" id="{A55B8354-F060-F483-C9E2-EEF4227E7B11}"/>
               </a:ext>
             </a:extLst>
           </p:cNvPr>
@@ -2976,7 +2976,7 @@
           <a:bodyPr/>
           <a:lstStyle/>
           <a:p>
-            <a:fld id="{475EA330-579B-47B0-8A9E-51FFEC34E67B}" type="slidenum">
+            <a:fld id="{AE2C703E-0CF4-40BE-9F3E-B1E910B497EA}" type="slidenum">
               <a:rPr kumimoji="1" lang="ja-JP" altLang="en-US" smtClean="0"/>
               <a:t>‹#›</a:t>
             </a:fld>
@@ -2987,7 +2987,7 @@
     </p:spTree>
     <p:extLst>
       <p:ext uri="{BB962C8B-B14F-4D97-AF65-F5344CB8AC3E}">
-        <p14:creationId xmlns:p14="http://schemas.microsoft.com/office/powerpoint/2010/main" val="2030575845"/>
+        <p14:creationId xmlns:p14="http://schemas.microsoft.com/office/powerpoint/2010/main" val="2631801749"/>
       </p:ext>
     </p:extLst>
   </p:cSld>
@@ -3024,7 +3024,7 @@
           <p:cNvPr id="2" name="タイトル プレースホルダー 1">
             <a:extLst>
               <a:ext uri="{FF2B5EF4-FFF2-40B4-BE49-F238E27FC236}">
-                <a16:creationId xmlns:a16="http://schemas.microsoft.com/office/drawing/2014/main" id="{0312EC7E-4E5C-C128-DEE1-43F8191F23C7}"/>
+                <a16:creationId xmlns:a16="http://schemas.microsoft.com/office/drawing/2014/main" id="{E64F9E2A-FE72-31BD-A961-11011A44602E}"/>
               </a:ext>
             </a:extLst>
           </p:cNvPr>
@@ -3062,7 +3062,7 @@
           <p:cNvPr id="3" name="テキスト プレースホルダー 2">
             <a:extLst>
               <a:ext uri="{FF2B5EF4-FFF2-40B4-BE49-F238E27FC236}">
-                <a16:creationId xmlns:a16="http://schemas.microsoft.com/office/drawing/2014/main" id="{9B91F0AE-848E-E5A5-1D14-7745464387BB}"/>
+                <a16:creationId xmlns:a16="http://schemas.microsoft.com/office/drawing/2014/main" id="{4495D79F-B32F-6187-2D2E-A0A7B9E34D34}"/>
               </a:ext>
             </a:extLst>
           </p:cNvPr>
@@ -3161,7 +3161,7 @@
           <p:cNvPr id="4" name="日付プレースホルダー 3">
             <a:extLst>
               <a:ext uri="{FF2B5EF4-FFF2-40B4-BE49-F238E27FC236}">
-                <a16:creationId xmlns:a16="http://schemas.microsoft.com/office/drawing/2014/main" id="{11E18B4F-5A15-A1BC-EA3D-5F318E490E67}"/>
+                <a16:creationId xmlns:a16="http://schemas.microsoft.com/office/drawing/2014/main" id="{F51535F5-600C-917B-5AB6-7D96BC05FE4F}"/>
               </a:ext>
             </a:extLst>
           </p:cNvPr>
@@ -3195,7 +3195,7 @@
             </a:lvl1pPr>
           </a:lstStyle>
           <a:p>
-            <a:fld id="{D5A826E8-87E6-4C21-A3D7-962979163097}" type="datetimeFigureOut">
+            <a:fld id="{6F22473F-8440-407A-B58F-DBB6E30D6157}" type="datetimeFigureOut">
               <a:rPr kumimoji="1" lang="ja-JP" altLang="en-US" smtClean="0"/>
               <a:t>2026/7/30</a:t>
             </a:fld>
@@ -3208,7 +3208,7 @@
           <p:cNvPr id="5" name="フッター プレースホルダー 4">
             <a:extLst>
               <a:ext uri="{FF2B5EF4-FFF2-40B4-BE49-F238E27FC236}">
-                <a16:creationId xmlns:a16="http://schemas.microsoft.com/office/drawing/2014/main" id="{9BDEF330-2487-9D79-C39F-34E193DBF09C}"/>
+                <a16:creationId xmlns:a16="http://schemas.microsoft.com/office/drawing/2014/main" id="{9EDB1A92-D515-FE99-E4E3-08E558B32A22}"/>
               </a:ext>
             </a:extLst>
           </p:cNvPr>
@@ -3251,7 +3251,7 @@
           <p:cNvPr id="6" name="スライド番号プレースホルダー 5">
             <a:extLst>
               <a:ext uri="{FF2B5EF4-FFF2-40B4-BE49-F238E27FC236}">
-                <a16:creationId xmlns:a16="http://schemas.microsoft.com/office/drawing/2014/main" id="{313F3D55-58D2-AA2E-4F8F-9B8F952136CB}"/>
+                <a16:creationId xmlns:a16="http://schemas.microsoft.com/office/drawing/2014/main" id="{889C6A84-F6BF-41B8-51CB-90CA9C45C815}"/>
               </a:ext>
             </a:extLst>
           </p:cNvPr>
@@ -3285,7 +3285,7 @@
             </a:lvl1pPr>
           </a:lstStyle>
           <a:p>
-            <a:fld id="{475EA330-579B-47B0-8A9E-51FFEC34E67B}" type="slidenum">
+            <a:fld id="{AE2C703E-0CF4-40BE-9F3E-B1E910B497EA}" type="slidenum">
               <a:rPr kumimoji="1" lang="ja-JP" altLang="en-US" smtClean="0"/>
               <a:t>‹#›</a:t>
             </a:fld>
@@ -3296,7 +3296,7 @@
     </p:spTree>
     <p:extLst>
       <p:ext uri="{BB962C8B-B14F-4D97-AF65-F5344CB8AC3E}">
-        <p14:creationId xmlns:p14="http://schemas.microsoft.com/office/powerpoint/2010/main" val="2665386977"/>
+        <p14:creationId xmlns:p14="http://schemas.microsoft.com/office/powerpoint/2010/main" val="3876433429"/>
       </p:ext>
     </p:extLst>
   </p:cSld>
@@ -3619,7 +3619,7 @@
           <p:cNvPr id="2" name="テキスト ボックス 1">
             <a:extLst>
               <a:ext uri="{FF2B5EF4-FFF2-40B4-BE49-F238E27FC236}">
-                <a16:creationId xmlns:a16="http://schemas.microsoft.com/office/drawing/2014/main" id="{DF59348B-D673-05F4-6E39-D1CFD02DB778}"/>
+                <a16:creationId xmlns:a16="http://schemas.microsoft.com/office/drawing/2014/main" id="{EF88A734-B636-6150-C04D-57ED0711BDBC}"/>
               </a:ext>
             </a:extLst>
           </p:cNvPr>
@@ -3665,7 +3665,7 @@
           <p:cNvPr id="3" name="テキスト ボックス 2">
             <a:extLst>
               <a:ext uri="{FF2B5EF4-FFF2-40B4-BE49-F238E27FC236}">
-                <a16:creationId xmlns:a16="http://schemas.microsoft.com/office/drawing/2014/main" id="{0D75DC5B-5CDD-A707-EA65-1FE3E3A96F4B}"/>
+                <a16:creationId xmlns:a16="http://schemas.microsoft.com/office/drawing/2014/main" id="{DCFD7EE8-FEA2-18DE-B306-1164EADF2FA3}"/>
               </a:ext>
             </a:extLst>
           </p:cNvPr>
@@ -3714,7 +3714,7 @@
           <p:cNvPr id="4" name="テキスト ボックス 3">
             <a:extLst>
               <a:ext uri="{FF2B5EF4-FFF2-40B4-BE49-F238E27FC236}">
-                <a16:creationId xmlns:a16="http://schemas.microsoft.com/office/drawing/2014/main" id="{AFB15859-A7A3-3C81-9BBD-AD0C0D43F305}"/>
+                <a16:creationId xmlns:a16="http://schemas.microsoft.com/office/drawing/2014/main" id="{A77606A7-6A41-34CA-6CF2-BC684B2EFA4C}"/>
               </a:ext>
             </a:extLst>
           </p:cNvPr>
@@ -3754,7 +3754,7 @@
           <p:cNvPr id="5" name="テキスト ボックス 4">
             <a:extLst>
               <a:ext uri="{FF2B5EF4-FFF2-40B4-BE49-F238E27FC236}">
-                <a16:creationId xmlns:a16="http://schemas.microsoft.com/office/drawing/2014/main" id="{7531B7D3-604B-D6A1-3AD0-C996DDA8FF20}"/>
+                <a16:creationId xmlns:a16="http://schemas.microsoft.com/office/drawing/2014/main" id="{8A2967A6-85A8-27B6-6DE0-0A33514BB7C2}"/>
               </a:ext>
             </a:extLst>
           </p:cNvPr>
@@ -3801,7 +3801,7 @@
             <a:hlinkClick r:id="" action="ppaction://media"/>
             <a:extLst>
               <a:ext uri="{FF2B5EF4-FFF2-40B4-BE49-F238E27FC236}">
-                <a16:creationId xmlns:a16="http://schemas.microsoft.com/office/drawing/2014/main" id="{A872C0EE-97B7-9CEE-C1DF-664B6518EDE4}"/>
+                <a16:creationId xmlns:a16="http://schemas.microsoft.com/office/drawing/2014/main" id="{BB1E6840-15A2-CCA2-7743-34B61184BDDD}"/>
               </a:ext>
             </a:extLst>
           </p:cNvPr>
@@ -3836,7 +3836,7 @@
     </p:spTree>
     <p:extLst>
       <p:ext uri="{BB962C8B-B14F-4D97-AF65-F5344CB8AC3E}">
-        <p14:creationId xmlns:p14="http://schemas.microsoft.com/office/powerpoint/2010/main" val="2945005524"/>
+        <p14:creationId xmlns:p14="http://schemas.microsoft.com/office/powerpoint/2010/main" val="3001842715"/>
       </p:ext>
     </p:extLst>
   </p:cSld>
@@ -3960,7 +3960,7 @@
           <p:cNvPr id="2" name="テキスト ボックス 1">
             <a:extLst>
               <a:ext uri="{FF2B5EF4-FFF2-40B4-BE49-F238E27FC236}">
-                <a16:creationId xmlns:a16="http://schemas.microsoft.com/office/drawing/2014/main" id="{F68D5AD6-DF7C-6C3F-F52E-968E3B53AA43}"/>
+                <a16:creationId xmlns:a16="http://schemas.microsoft.com/office/drawing/2014/main" id="{5F2C6510-066A-AE2E-14EB-35BA0C6F97B7}"/>
               </a:ext>
             </a:extLst>
           </p:cNvPr>
@@ -4006,7 +4006,7 @@
           <p:cNvPr id="3" name="テキスト ボックス 2">
             <a:extLst>
               <a:ext uri="{FF2B5EF4-FFF2-40B4-BE49-F238E27FC236}">
-                <a16:creationId xmlns:a16="http://schemas.microsoft.com/office/drawing/2014/main" id="{B5703CEC-082E-02B3-A821-D59425F666AB}"/>
+                <a16:creationId xmlns:a16="http://schemas.microsoft.com/office/drawing/2014/main" id="{A0087FB7-41F2-E1AD-4221-F44E418EFA76}"/>
               </a:ext>
             </a:extLst>
           </p:cNvPr>
@@ -4046,7 +4046,7 @@
           <p:cNvPr id="4" name="テキスト ボックス 3">
             <a:extLst>
               <a:ext uri="{FF2B5EF4-FFF2-40B4-BE49-F238E27FC236}">
-                <a16:creationId xmlns:a16="http://schemas.microsoft.com/office/drawing/2014/main" id="{6BC4DBE4-D004-3B7C-F19C-0521B3665F50}"/>
+                <a16:creationId xmlns:a16="http://schemas.microsoft.com/office/drawing/2014/main" id="{47893781-CD6B-F5A9-8AD9-518EE3C53CBF}"/>
               </a:ext>
             </a:extLst>
           </p:cNvPr>
@@ -4110,7 +4110,7 @@
           <p:cNvPr id="5" name="テキスト ボックス 4">
             <a:extLst>
               <a:ext uri="{FF2B5EF4-FFF2-40B4-BE49-F238E27FC236}">
-                <a16:creationId xmlns:a16="http://schemas.microsoft.com/office/drawing/2014/main" id="{7857BBB0-95AE-ACD5-1424-A2F476F373AC}"/>
+                <a16:creationId xmlns:a16="http://schemas.microsoft.com/office/drawing/2014/main" id="{A3237AA0-3887-AD93-401C-62478EFC9560}"/>
               </a:ext>
             </a:extLst>
           </p:cNvPr>
@@ -4157,7 +4157,7 @@
             <a:hlinkClick r:id="" action="ppaction://media"/>
             <a:extLst>
               <a:ext uri="{FF2B5EF4-FFF2-40B4-BE49-F238E27FC236}">
-                <a16:creationId xmlns:a16="http://schemas.microsoft.com/office/drawing/2014/main" id="{8D2D030C-47CF-F6B9-8CE6-7CD006B9AD88}"/>
+                <a16:creationId xmlns:a16="http://schemas.microsoft.com/office/drawing/2014/main" id="{927FEF79-95AD-A700-7BB8-DD275483B02F}"/>
               </a:ext>
             </a:extLst>
           </p:cNvPr>
@@ -4192,7 +4192,7 @@
     </p:spTree>
     <p:extLst>
       <p:ext uri="{BB962C8B-B14F-4D97-AF65-F5344CB8AC3E}">
-        <p14:creationId xmlns:p14="http://schemas.microsoft.com/office/powerpoint/2010/main" val="3415905352"/>
+        <p14:creationId xmlns:p14="http://schemas.microsoft.com/office/powerpoint/2010/main" val="2262595300"/>
       </p:ext>
     </p:extLst>
   </p:cSld>
@@ -4316,7 +4316,7 @@
           <p:cNvPr id="2" name="テキスト ボックス 1">
             <a:extLst>
               <a:ext uri="{FF2B5EF4-FFF2-40B4-BE49-F238E27FC236}">
-                <a16:creationId xmlns:a16="http://schemas.microsoft.com/office/drawing/2014/main" id="{CF47D4AA-7E24-F328-CC17-E87AE7845F69}"/>
+                <a16:creationId xmlns:a16="http://schemas.microsoft.com/office/drawing/2014/main" id="{7FF6BADF-A78D-8776-8E08-A8A53ADD5701}"/>
               </a:ext>
             </a:extLst>
           </p:cNvPr>
@@ -4362,7 +4362,7 @@
           <p:cNvPr id="3" name="テキスト ボックス 2">
             <a:extLst>
               <a:ext uri="{FF2B5EF4-FFF2-40B4-BE49-F238E27FC236}">
-                <a16:creationId xmlns:a16="http://schemas.microsoft.com/office/drawing/2014/main" id="{D3D983F5-BA1F-3852-F81C-D125BB6163E7}"/>
+                <a16:creationId xmlns:a16="http://schemas.microsoft.com/office/drawing/2014/main" id="{4B9F4568-95B1-9D43-B33E-35B6A6C64B31}"/>
               </a:ext>
             </a:extLst>
           </p:cNvPr>
@@ -4402,7 +4402,7 @@
           <p:cNvPr id="4" name="テキスト ボックス 3">
             <a:extLst>
               <a:ext uri="{FF2B5EF4-FFF2-40B4-BE49-F238E27FC236}">
-                <a16:creationId xmlns:a16="http://schemas.microsoft.com/office/drawing/2014/main" id="{BBC722FA-60FD-7A87-40FC-098491AA92ED}"/>
+                <a16:creationId xmlns:a16="http://schemas.microsoft.com/office/drawing/2014/main" id="{B5C3CE55-8B59-5A19-625F-22BC797EDEAE}"/>
               </a:ext>
             </a:extLst>
           </p:cNvPr>
@@ -4497,7 +4497,7 @@
           <p:cNvPr id="5" name="テキスト ボックス 4">
             <a:extLst>
               <a:ext uri="{FF2B5EF4-FFF2-40B4-BE49-F238E27FC236}">
-                <a16:creationId xmlns:a16="http://schemas.microsoft.com/office/drawing/2014/main" id="{4AAB8DA3-7B3E-A2F1-2FE9-B58827899749}"/>
+                <a16:creationId xmlns:a16="http://schemas.microsoft.com/office/drawing/2014/main" id="{166BC64B-E1E0-2E7C-759B-3D9F6D9A4D3E}"/>
               </a:ext>
             </a:extLst>
           </p:cNvPr>
@@ -4544,7 +4544,7 @@
             <a:hlinkClick r:id="" action="ppaction://media"/>
             <a:extLst>
               <a:ext uri="{FF2B5EF4-FFF2-40B4-BE49-F238E27FC236}">
-                <a16:creationId xmlns:a16="http://schemas.microsoft.com/office/drawing/2014/main" id="{24020966-CF83-74EF-6CF6-58861F0B524A}"/>
+                <a16:creationId xmlns:a16="http://schemas.microsoft.com/office/drawing/2014/main" id="{3A53D4A2-EFCA-AA02-9D24-4DA6216E5F03}"/>
               </a:ext>
             </a:extLst>
           </p:cNvPr>
@@ -4579,7 +4579,7 @@
     </p:spTree>
     <p:extLst>
       <p:ext uri="{BB962C8B-B14F-4D97-AF65-F5344CB8AC3E}">
-        <p14:creationId xmlns:p14="http://schemas.microsoft.com/office/powerpoint/2010/main" val="2179063733"/>
+        <p14:creationId xmlns:p14="http://schemas.microsoft.com/office/powerpoint/2010/main" val="2455881497"/>
       </p:ext>
     </p:extLst>
   </p:cSld>
@@ -4703,7 +4703,7 @@
           <p:cNvPr id="2" name="テキスト ボックス 1">
             <a:extLst>
               <a:ext uri="{FF2B5EF4-FFF2-40B4-BE49-F238E27FC236}">
-                <a16:creationId xmlns:a16="http://schemas.microsoft.com/office/drawing/2014/main" id="{20540931-E0CE-0135-91E1-E8B2FF226A55}"/>
+                <a16:creationId xmlns:a16="http://schemas.microsoft.com/office/drawing/2014/main" id="{FABF424A-D2CA-72E8-092C-7D33E5F74EA0}"/>
               </a:ext>
             </a:extLst>
           </p:cNvPr>
@@ -4749,7 +4749,7 @@
           <p:cNvPr id="3" name="テキスト ボックス 2">
             <a:extLst>
               <a:ext uri="{FF2B5EF4-FFF2-40B4-BE49-F238E27FC236}">
-                <a16:creationId xmlns:a16="http://schemas.microsoft.com/office/drawing/2014/main" id="{5A25F3F5-79D4-0F18-5687-AF5B554D4FBD}"/>
+                <a16:creationId xmlns:a16="http://schemas.microsoft.com/office/drawing/2014/main" id="{05DAE023-FC9C-56CF-3137-146CBA40FB6B}"/>
               </a:ext>
             </a:extLst>
           </p:cNvPr>
@@ -4789,7 +4789,7 @@
           <p:cNvPr id="4" name="テキスト ボックス 3">
             <a:extLst>
               <a:ext uri="{FF2B5EF4-FFF2-40B4-BE49-F238E27FC236}">
-                <a16:creationId xmlns:a16="http://schemas.microsoft.com/office/drawing/2014/main" id="{511D1F2B-7DAC-06CE-76B3-0855E037AC76}"/>
+                <a16:creationId xmlns:a16="http://schemas.microsoft.com/office/drawing/2014/main" id="{53A21122-5AC0-1448-4BBC-ABE3A46DF230}"/>
               </a:ext>
             </a:extLst>
           </p:cNvPr>
@@ -4899,7 +4899,7 @@
           <p:cNvPr id="5" name="テキスト ボックス 4">
             <a:extLst>
               <a:ext uri="{FF2B5EF4-FFF2-40B4-BE49-F238E27FC236}">
-                <a16:creationId xmlns:a16="http://schemas.microsoft.com/office/drawing/2014/main" id="{BD57C386-0DAA-5ED9-8971-506B1D0179A0}"/>
+                <a16:creationId xmlns:a16="http://schemas.microsoft.com/office/drawing/2014/main" id="{4C9ABA4C-6190-684E-2E50-35CFF029E34F}"/>
               </a:ext>
             </a:extLst>
           </p:cNvPr>
@@ -4946,7 +4946,7 @@
             <a:hlinkClick r:id="" action="ppaction://media"/>
             <a:extLst>
               <a:ext uri="{FF2B5EF4-FFF2-40B4-BE49-F238E27FC236}">
-                <a16:creationId xmlns:a16="http://schemas.microsoft.com/office/drawing/2014/main" id="{E152B028-87BE-6AE7-C222-F8042E158672}"/>
+                <a16:creationId xmlns:a16="http://schemas.microsoft.com/office/drawing/2014/main" id="{11EFDE7D-F5F6-C775-F5BA-B94A971BDE32}"/>
               </a:ext>
             </a:extLst>
           </p:cNvPr>
@@ -4981,7 +4981,7 @@
     </p:spTree>
     <p:extLst>
       <p:ext uri="{BB962C8B-B14F-4D97-AF65-F5344CB8AC3E}">
-        <p14:creationId xmlns:p14="http://schemas.microsoft.com/office/powerpoint/2010/main" val="205314937"/>
+        <p14:creationId xmlns:p14="http://schemas.microsoft.com/office/powerpoint/2010/main" val="3258684224"/>
       </p:ext>
     </p:extLst>
   </p:cSld>
@@ -5105,7 +5105,7 @@
           <p:cNvPr id="2" name="テキスト ボックス 1">
             <a:extLst>
               <a:ext uri="{FF2B5EF4-FFF2-40B4-BE49-F238E27FC236}">
-                <a16:creationId xmlns:a16="http://schemas.microsoft.com/office/drawing/2014/main" id="{EC7F55D7-273F-F176-EF6E-B9EFDF5DAF82}"/>
+                <a16:creationId xmlns:a16="http://schemas.microsoft.com/office/drawing/2014/main" id="{CC9A6E6A-3B96-F7FE-1081-99ADEBD63552}"/>
               </a:ext>
             </a:extLst>
           </p:cNvPr>
@@ -5151,7 +5151,7 @@
           <p:cNvPr id="3" name="テキスト ボックス 2">
             <a:extLst>
               <a:ext uri="{FF2B5EF4-FFF2-40B4-BE49-F238E27FC236}">
-                <a16:creationId xmlns:a16="http://schemas.microsoft.com/office/drawing/2014/main" id="{02CEAEC5-43C0-623C-E800-C59EEA2C8A12}"/>
+                <a16:creationId xmlns:a16="http://schemas.microsoft.com/office/drawing/2014/main" id="{96516566-66F6-5476-3A81-7CB97BD7BAE2}"/>
               </a:ext>
             </a:extLst>
           </p:cNvPr>
@@ -5191,7 +5191,7 @@
           <p:cNvPr id="4" name="テキスト ボックス 3">
             <a:extLst>
               <a:ext uri="{FF2B5EF4-FFF2-40B4-BE49-F238E27FC236}">
-                <a16:creationId xmlns:a16="http://schemas.microsoft.com/office/drawing/2014/main" id="{8548F15C-9143-35AD-9123-4B08FD81CCC3}"/>
+                <a16:creationId xmlns:a16="http://schemas.microsoft.com/office/drawing/2014/main" id="{9E3144EB-954C-B73C-51C8-16D792762930}"/>
               </a:ext>
             </a:extLst>
           </p:cNvPr>
@@ -5215,20 +5215,14 @@
           <a:lstStyle/>
           <a:p>
             <a:r>
-              <a:rPr kumimoji="1" lang="en-US" altLang="ja-JP" sz="2000">
+              <a:rPr kumimoji="1" lang="ja-JP" altLang="en-US" sz="2000">
                 <a:solidFill>
                   <a:srgbClr val="333333"/>
                 </a:solidFill>
                 <a:latin typeface="Arial" panose="020B0604020202020204" pitchFamily="34" charset="0"/>
               </a:rPr>
-              <a:t>Set confirmed custom domain</a:t>
-            </a:r>
-            <a:endParaRPr kumimoji="1" lang="ja-JP" altLang="en-US" sz="2000">
-              <a:solidFill>
-                <a:srgbClr val="333333"/>
-              </a:solidFill>
-              <a:latin typeface="Arial" panose="020B0604020202020204" pitchFamily="34" charset="0"/>
-            </a:endParaRPr>
+              <a:t>直近のコミットでは、実装の見直しと継続的な改善が行われました。</a:t>
+            </a:r>
           </a:p>
         </p:txBody>
       </p:sp>
@@ -5237,7 +5231,7 @@
           <p:cNvPr id="5" name="テキスト ボックス 4">
             <a:extLst>
               <a:ext uri="{FF2B5EF4-FFF2-40B4-BE49-F238E27FC236}">
-                <a16:creationId xmlns:a16="http://schemas.microsoft.com/office/drawing/2014/main" id="{6982B9E1-3A00-2CAB-FEB5-E2DEE78E2AC5}"/>
+                <a16:creationId xmlns:a16="http://schemas.microsoft.com/office/drawing/2014/main" id="{38EDD0DD-5F52-FD57-7850-DE086F71B78B}"/>
               </a:ext>
             </a:extLst>
           </p:cNvPr>
@@ -5284,7 +5278,7 @@
             <a:hlinkClick r:id="" action="ppaction://media"/>
             <a:extLst>
               <a:ext uri="{FF2B5EF4-FFF2-40B4-BE49-F238E27FC236}">
-                <a16:creationId xmlns:a16="http://schemas.microsoft.com/office/drawing/2014/main" id="{06AD8D79-FADC-8611-AF4A-B24E915008AF}"/>
+                <a16:creationId xmlns:a16="http://schemas.microsoft.com/office/drawing/2014/main" id="{163F5A56-9619-9DA1-27F5-F05C5AD64C48}"/>
               </a:ext>
             </a:extLst>
           </p:cNvPr>
@@ -5319,7 +5313,7 @@
     </p:spTree>
     <p:extLst>
       <p:ext uri="{BB962C8B-B14F-4D97-AF65-F5344CB8AC3E}">
-        <p14:creationId xmlns:p14="http://schemas.microsoft.com/office/powerpoint/2010/main" val="1713170375"/>
+        <p14:creationId xmlns:p14="http://schemas.microsoft.com/office/powerpoint/2010/main" val="2239485048"/>
       </p:ext>
     </p:extLst>
   </p:cSld>
@@ -5362,7 +5356,7 @@
                                   <p:childTnLst>
                                     <p:cmd type="call" cmd="playFrom(0.0)">
                                       <p:cBhvr>
-                                        <p:cTn id="6" dur="6451" fill="hold"/>
+                                        <p:cTn id="6" dur="6076" fill="hold"/>
                                         <p:tgtEl>
                                           <p:spTgt spid="6"/>
                                         </p:tgtEl>
@@ -5443,7 +5437,7 @@
           <p:cNvPr id="2" name="テキスト ボックス 1">
             <a:extLst>
               <a:ext uri="{FF2B5EF4-FFF2-40B4-BE49-F238E27FC236}">
-                <a16:creationId xmlns:a16="http://schemas.microsoft.com/office/drawing/2014/main" id="{1F1BA729-569D-8BD3-33DB-3EF399AA2D14}"/>
+                <a16:creationId xmlns:a16="http://schemas.microsoft.com/office/drawing/2014/main" id="{AAC702D7-8814-633A-BBBF-4DD8B2A8A1B7}"/>
               </a:ext>
             </a:extLst>
           </p:cNvPr>
@@ -5489,7 +5483,7 @@
           <p:cNvPr id="3" name="テキスト ボックス 2">
             <a:extLst>
               <a:ext uri="{FF2B5EF4-FFF2-40B4-BE49-F238E27FC236}">
-                <a16:creationId xmlns:a16="http://schemas.microsoft.com/office/drawing/2014/main" id="{8A2E0D8E-E438-D021-CE6D-CCF5C9D5A83E}"/>
+                <a16:creationId xmlns:a16="http://schemas.microsoft.com/office/drawing/2014/main" id="{DBCBFF48-AC67-D764-DE3E-6DB66BD11C41}"/>
               </a:ext>
             </a:extLst>
           </p:cNvPr>
@@ -5529,7 +5523,7 @@
           <p:cNvPr id="4" name="テキスト ボックス 3">
             <a:extLst>
               <a:ext uri="{FF2B5EF4-FFF2-40B4-BE49-F238E27FC236}">
-                <a16:creationId xmlns:a16="http://schemas.microsoft.com/office/drawing/2014/main" id="{5B18A33C-CCF4-0393-DD35-8D0A7D364265}"/>
+                <a16:creationId xmlns:a16="http://schemas.microsoft.com/office/drawing/2014/main" id="{F1DE850F-F72C-BD0B-1298-CDA4DDCDB764}"/>
               </a:ext>
             </a:extLst>
           </p:cNvPr>
@@ -5594,7 +5588,7 @@
           <p:cNvPr id="5" name="テキスト ボックス 4">
             <a:extLst>
               <a:ext uri="{FF2B5EF4-FFF2-40B4-BE49-F238E27FC236}">
-                <a16:creationId xmlns:a16="http://schemas.microsoft.com/office/drawing/2014/main" id="{6DAF85DB-B45F-A10E-C6D3-07CECAD9B7D1}"/>
+                <a16:creationId xmlns:a16="http://schemas.microsoft.com/office/drawing/2014/main" id="{9E1120D2-6531-2B8E-516B-D4D6B6927E3B}"/>
               </a:ext>
             </a:extLst>
           </p:cNvPr>
@@ -5641,7 +5635,7 @@
             <a:hlinkClick r:id="" action="ppaction://media"/>
             <a:extLst>
               <a:ext uri="{FF2B5EF4-FFF2-40B4-BE49-F238E27FC236}">
-                <a16:creationId xmlns:a16="http://schemas.microsoft.com/office/drawing/2014/main" id="{C5B15E31-D705-3EA7-F0C3-E441853E87EF}"/>
+                <a16:creationId xmlns:a16="http://schemas.microsoft.com/office/drawing/2014/main" id="{99E3CFB6-24D9-1471-627F-A46F08C4E8E8}"/>
               </a:ext>
             </a:extLst>
           </p:cNvPr>
@@ -5676,7 +5670,7 @@
     </p:spTree>
     <p:extLst>
       <p:ext uri="{BB962C8B-B14F-4D97-AF65-F5344CB8AC3E}">
-        <p14:creationId xmlns:p14="http://schemas.microsoft.com/office/powerpoint/2010/main" val="3156220037"/>
+        <p14:creationId xmlns:p14="http://schemas.microsoft.com/office/powerpoint/2010/main" val="3434823805"/>
       </p:ext>
     </p:extLst>
   </p:cSld>
